--- a/muKV_talk.pptx
+++ b/muKV_talk.pptx
@@ -3938,7 +3938,7 @@
                 </a:solidFill>
                 <a:latin typeface="Arial"/>
               </a:rPr>
-              <a:t>μKV: Sequence-Level, Attention-Scored KV-Cache Eviction That Pays on a Phone</a:t>
+              <a:t>μKV: Energy- and Thermal-Aware KV-Cache Eviction for LLM Inference on a Phone</a:t>
             </a:r>
           </a:p>
         </p:txBody>
@@ -25019,13 +25019,13 @@
               </a:lnSpc>
             </a:pPr>
             <a:r>
-              <a:rPr sz="1250" b="0" i="0">
+              <a:rPr sz="1150" b="0" i="0">
                 <a:solidFill>
                   <a:srgbClr val="38424E"/>
                 </a:solidFill>
                 <a:latin typeface="Arial"/>
               </a:rPr>
-              <a:t>Every decoded token reads the model weights W plus the live cache KV. Eviction can only shrink KV. So even a zero-size cache cannot go faster than (W+KV)/W. On the phone GPU, Llama-1B weights are 800 MB against a 319 MB cache, so that ceiling is 1.40×, and no evictor can beat it.</a:t>
+              <a:t>Every decoded token reads the weights W plus the live cache KV, and eviction only shrinks KV. So even a zero-size cache cannot beat (W+KV)/W. On the phone GPU that ceiling is 1.40×: Llama-1B has 800 MB of weights against a 319 MB cache.</a:t>
             </a:r>
           </a:p>
         </p:txBody>
